--- a/CV1711-WEEK1-3.pptx
+++ b/CV1711-WEEK1-3.pptx
@@ -138,7 +138,7 @@
 <file path=ppt/revisionInfo.xml><?xml version="1.0" encoding="utf-8"?>
 <p1510:revInfo xmlns:a="http://schemas.openxmlformats.org/drawingml/2006/main" xmlns:r="http://schemas.openxmlformats.org/officeDocument/2006/relationships" xmlns:p1510="http://schemas.microsoft.com/office/powerpoint/2015/10/main">
   <p1510:revLst>
-    <p1510:client id="{96D5FD82-C974-4DCE-A590-0E778D7ED507}" v="116" dt="2026-01-11T13:05:03.449"/>
+    <p1510:client id="{96D5FD82-C974-4DCE-A590-0E778D7ED507}" v="130" dt="2026-01-11T13:15:59.687"/>
   </p1510:revLst>
 </p1510:revInfo>
 </file>
@@ -148,7 +148,7 @@
   <pc:docChgLst>
     <pc:chgData name="#CUI SHUAIWEN#" userId="35a196ea-bcb8-475e-86cf-0b9eaca8a48f" providerId="ADAL" clId="{4D8D382B-DDFF-455F-B5ED-E854E938891F}"/>
     <pc:docChg chg="undo custSel addSld delSld modSld sldOrd">
-      <pc:chgData name="#CUI SHUAIWEN#" userId="35a196ea-bcb8-475e-86cf-0b9eaca8a48f" providerId="ADAL" clId="{4D8D382B-DDFF-455F-B5ED-E854E938891F}" dt="2026-01-11T13:05:18.850" v="3047" actId="20577"/>
+      <pc:chgData name="#CUI SHUAIWEN#" userId="35a196ea-bcb8-475e-86cf-0b9eaca8a48f" providerId="ADAL" clId="{4D8D382B-DDFF-455F-B5ED-E854E938891F}" dt="2026-01-11T13:16:07.335" v="3099" actId="14100"/>
       <pc:docMkLst>
         <pc:docMk/>
       </pc:docMkLst>
@@ -1337,7 +1337,7 @@
         </pc:sldMkLst>
       </pc:sldChg>
       <pc:sldChg chg="addSp delSp modSp add mod">
-        <pc:chgData name="#CUI SHUAIWEN#" userId="35a196ea-bcb8-475e-86cf-0b9eaca8a48f" providerId="ADAL" clId="{4D8D382B-DDFF-455F-B5ED-E854E938891F}" dt="2026-01-11T13:05:18.850" v="3047" actId="20577"/>
+        <pc:chgData name="#CUI SHUAIWEN#" userId="35a196ea-bcb8-475e-86cf-0b9eaca8a48f" providerId="ADAL" clId="{4D8D382B-DDFF-455F-B5ED-E854E938891F}" dt="2026-01-11T13:16:07.335" v="3099" actId="14100"/>
         <pc:sldMkLst>
           <pc:docMk/>
           <pc:sldMk cId="987049720" sldId="269"/>
@@ -1358,12 +1358,76 @@
             <ac:spMk id="4" creationId="{A7312DF1-DB15-76D1-E76F-54C6DFDACBB5}"/>
           </ac:spMkLst>
         </pc:spChg>
+        <pc:spChg chg="add">
+          <ac:chgData name="#CUI SHUAIWEN#" userId="35a196ea-bcb8-475e-86cf-0b9eaca8a48f" providerId="ADAL" clId="{4D8D382B-DDFF-455F-B5ED-E854E938891F}" dt="2026-01-11T13:12:10.197" v="3053"/>
+          <ac:spMkLst>
+            <pc:docMk/>
+            <pc:sldMk cId="987049720" sldId="269"/>
+            <ac:spMk id="5" creationId="{83B68BC0-F7EB-03A5-85DC-D6ABE5CB43E2}"/>
+          </ac:spMkLst>
+        </pc:spChg>
+        <pc:spChg chg="add del mod">
+          <ac:chgData name="#CUI SHUAIWEN#" userId="35a196ea-bcb8-475e-86cf-0b9eaca8a48f" providerId="ADAL" clId="{4D8D382B-DDFF-455F-B5ED-E854E938891F}" dt="2026-01-11T13:12:57.399" v="3057" actId="478"/>
+          <ac:spMkLst>
+            <pc:docMk/>
+            <pc:sldMk cId="987049720" sldId="269"/>
+            <ac:spMk id="6" creationId="{5CF911B8-2DCE-3CA5-1098-0172A0E91D33}"/>
+          </ac:spMkLst>
+        </pc:spChg>
+        <pc:spChg chg="add">
+          <ac:chgData name="#CUI SHUAIWEN#" userId="35a196ea-bcb8-475e-86cf-0b9eaca8a48f" providerId="ADAL" clId="{4D8D382B-DDFF-455F-B5ED-E854E938891F}" dt="2026-01-11T13:12:22.961" v="3055"/>
+          <ac:spMkLst>
+            <pc:docMk/>
+            <pc:sldMk cId="987049720" sldId="269"/>
+            <ac:spMk id="7" creationId="{7AE19AFE-941A-3446-B466-69778A2E62E7}"/>
+          </ac:spMkLst>
+        </pc:spChg>
+        <pc:spChg chg="add mod">
+          <ac:chgData name="#CUI SHUAIWEN#" userId="35a196ea-bcb8-475e-86cf-0b9eaca8a48f" providerId="ADAL" clId="{4D8D382B-DDFF-455F-B5ED-E854E938891F}" dt="2026-01-11T13:15:52.744" v="3093" actId="1582"/>
+          <ac:spMkLst>
+            <pc:docMk/>
+            <pc:sldMk cId="987049720" sldId="269"/>
+            <ac:spMk id="16" creationId="{7E0F29FD-C5C8-23F9-EA3F-D17CCFB0B60B}"/>
+          </ac:spMkLst>
+        </pc:spChg>
+        <pc:spChg chg="add mod">
+          <ac:chgData name="#CUI SHUAIWEN#" userId="35a196ea-bcb8-475e-86cf-0b9eaca8a48f" providerId="ADAL" clId="{4D8D382B-DDFF-455F-B5ED-E854E938891F}" dt="2026-01-11T13:15:48.635" v="3092" actId="1582"/>
+          <ac:spMkLst>
+            <pc:docMk/>
+            <pc:sldMk cId="987049720" sldId="269"/>
+            <ac:spMk id="19" creationId="{9B088EBD-1777-E072-C48A-7B3EB1AD8169}"/>
+          </ac:spMkLst>
+        </pc:spChg>
+        <pc:picChg chg="add mod">
+          <ac:chgData name="#CUI SHUAIWEN#" userId="35a196ea-bcb8-475e-86cf-0b9eaca8a48f" providerId="ADAL" clId="{4D8D382B-DDFF-455F-B5ED-E854E938891F}" dt="2026-01-11T13:14:29.279" v="3064" actId="1076"/>
+          <ac:picMkLst>
+            <pc:docMk/>
+            <pc:sldMk cId="987049720" sldId="269"/>
+            <ac:picMk id="4" creationId="{D8A208E8-88EE-0401-B957-FAFE5152721F}"/>
+          </ac:picMkLst>
+        </pc:picChg>
         <pc:picChg chg="del">
           <ac:chgData name="#CUI SHUAIWEN#" userId="35a196ea-bcb8-475e-86cf-0b9eaca8a48f" providerId="ADAL" clId="{4D8D382B-DDFF-455F-B5ED-E854E938891F}" dt="2026-01-11T13:04:56.018" v="3006" actId="478"/>
           <ac:picMkLst>
             <pc:docMk/>
             <pc:sldMk cId="987049720" sldId="269"/>
             <ac:picMk id="7" creationId="{0AF7F578-F142-260E-C63B-F539629F806A}"/>
+          </ac:picMkLst>
+        </pc:picChg>
+        <pc:picChg chg="add mod">
+          <ac:chgData name="#CUI SHUAIWEN#" userId="35a196ea-bcb8-475e-86cf-0b9eaca8a48f" providerId="ADAL" clId="{4D8D382B-DDFF-455F-B5ED-E854E938891F}" dt="2026-01-11T13:14:55.548" v="3074" actId="1076"/>
+          <ac:picMkLst>
+            <pc:docMk/>
+            <pc:sldMk cId="987049720" sldId="269"/>
+            <ac:picMk id="9" creationId="{FAB10BA0-EBCE-1EED-CBA4-2E5185D4F429}"/>
+          </ac:picMkLst>
+        </pc:picChg>
+        <pc:picChg chg="add mod">
+          <ac:chgData name="#CUI SHUAIWEN#" userId="35a196ea-bcb8-475e-86cf-0b9eaca8a48f" providerId="ADAL" clId="{4D8D382B-DDFF-455F-B5ED-E854E938891F}" dt="2026-01-11T13:14:53.308" v="3073" actId="1076"/>
+          <ac:picMkLst>
+            <pc:docMk/>
+            <pc:sldMk cId="987049720" sldId="269"/>
+            <ac:picMk id="11" creationId="{95E12AC2-DC1D-74EF-82B9-EB78F1266F7F}"/>
           </ac:picMkLst>
         </pc:picChg>
         <pc:cxnChg chg="del">
@@ -1380,6 +1444,30 @@
             <pc:docMk/>
             <pc:sldMk cId="987049720" sldId="269"/>
             <ac:cxnSpMk id="10" creationId="{3D403449-2B0B-CDCC-753D-BAA84DAACD95}"/>
+          </ac:cxnSpMkLst>
+        </pc:cxnChg>
+        <pc:cxnChg chg="add mod">
+          <ac:chgData name="#CUI SHUAIWEN#" userId="35a196ea-bcb8-475e-86cf-0b9eaca8a48f" providerId="ADAL" clId="{4D8D382B-DDFF-455F-B5ED-E854E938891F}" dt="2026-01-11T13:15:08.478" v="3078" actId="14100"/>
+          <ac:cxnSpMkLst>
+            <pc:docMk/>
+            <pc:sldMk cId="987049720" sldId="269"/>
+            <ac:cxnSpMk id="12" creationId="{3A1266E3-78EA-F711-3D66-742DA96A4E23}"/>
+          </ac:cxnSpMkLst>
+        </pc:cxnChg>
+        <pc:cxnChg chg="add mod">
+          <ac:chgData name="#CUI SHUAIWEN#" userId="35a196ea-bcb8-475e-86cf-0b9eaca8a48f" providerId="ADAL" clId="{4D8D382B-DDFF-455F-B5ED-E854E938891F}" dt="2026-01-11T13:15:58.714" v="3094" actId="14100"/>
+          <ac:cxnSpMkLst>
+            <pc:docMk/>
+            <pc:sldMk cId="987049720" sldId="269"/>
+            <ac:cxnSpMk id="17" creationId="{6CD26AAB-4A93-9ECB-14BE-61E6F44E5164}"/>
+          </ac:cxnSpMkLst>
+        </pc:cxnChg>
+        <pc:cxnChg chg="add mod">
+          <ac:chgData name="#CUI SHUAIWEN#" userId="35a196ea-bcb8-475e-86cf-0b9eaca8a48f" providerId="ADAL" clId="{4D8D382B-DDFF-455F-B5ED-E854E938891F}" dt="2026-01-11T13:16:07.335" v="3099" actId="14100"/>
+          <ac:cxnSpMkLst>
+            <pc:docMk/>
+            <pc:sldMk cId="987049720" sldId="269"/>
+            <ac:cxnSpMk id="21" creationId="{F3545CA8-659F-6416-28CF-C6D29B01723D}"/>
           </ac:cxnSpMkLst>
         </pc:cxnChg>
       </pc:sldChg>
@@ -4764,6 +4852,328 @@
           </a:p>
         </p:txBody>
       </p:sp>
+      <p:pic>
+        <p:nvPicPr>
+          <p:cNvPr id="4" name="Picture 3" descr="A qr code with a dinosaur&#10;&#10;AI-generated content may be incorrect.">
+            <a:extLst>
+              <a:ext uri="{FF2B5EF4-FFF2-40B4-BE49-F238E27FC236}">
+                <a16:creationId xmlns:a16="http://schemas.microsoft.com/office/drawing/2014/main" id="{D8A208E8-88EE-0401-B957-FAFE5152721F}"/>
+              </a:ext>
+            </a:extLst>
+          </p:cNvPr>
+          <p:cNvPicPr>
+            <a:picLocks noChangeAspect="1"/>
+          </p:cNvPicPr>
+          <p:nvPr/>
+        </p:nvPicPr>
+        <p:blipFill>
+          <a:blip r:embed="rId2"/>
+          <a:stretch>
+            <a:fillRect/>
+          </a:stretch>
+        </p:blipFill>
+        <p:spPr>
+          <a:xfrm>
+            <a:off x="140481" y="867424"/>
+            <a:ext cx="3756490" cy="3756490"/>
+          </a:xfrm>
+          <a:prstGeom prst="rect">
+            <a:avLst/>
+          </a:prstGeom>
+        </p:spPr>
+      </p:pic>
+      <p:pic>
+        <p:nvPicPr>
+          <p:cNvPr id="9" name="Picture 8" descr="A screenshot of a computer&#10;&#10;AI-generated content may be incorrect.">
+            <a:extLst>
+              <a:ext uri="{FF2B5EF4-FFF2-40B4-BE49-F238E27FC236}">
+                <a16:creationId xmlns:a16="http://schemas.microsoft.com/office/drawing/2014/main" id="{FAB10BA0-EBCE-1EED-CBA4-2E5185D4F429}"/>
+              </a:ext>
+            </a:extLst>
+          </p:cNvPr>
+          <p:cNvPicPr>
+            <a:picLocks noChangeAspect="1"/>
+          </p:cNvPicPr>
+          <p:nvPr/>
+        </p:nvPicPr>
+        <p:blipFill>
+          <a:blip r:embed="rId3"/>
+          <a:stretch>
+            <a:fillRect/>
+          </a:stretch>
+        </p:blipFill>
+        <p:spPr>
+          <a:xfrm>
+            <a:off x="4358895" y="691661"/>
+            <a:ext cx="1889099" cy="4107144"/>
+          </a:xfrm>
+          <a:prstGeom prst="rect">
+            <a:avLst/>
+          </a:prstGeom>
+        </p:spPr>
+      </p:pic>
+      <p:pic>
+        <p:nvPicPr>
+          <p:cNvPr id="11" name="Picture 10" descr="A screenshot of a chat&#10;&#10;AI-generated content may be incorrect.">
+            <a:extLst>
+              <a:ext uri="{FF2B5EF4-FFF2-40B4-BE49-F238E27FC236}">
+                <a16:creationId xmlns:a16="http://schemas.microsoft.com/office/drawing/2014/main" id="{95E12AC2-DC1D-74EF-82B9-EB78F1266F7F}"/>
+              </a:ext>
+            </a:extLst>
+          </p:cNvPr>
+          <p:cNvPicPr>
+            <a:picLocks noChangeAspect="1"/>
+          </p:cNvPicPr>
+          <p:nvPr/>
+        </p:nvPicPr>
+        <p:blipFill>
+          <a:blip r:embed="rId4"/>
+          <a:stretch>
+            <a:fillRect/>
+          </a:stretch>
+        </p:blipFill>
+        <p:spPr>
+          <a:xfrm>
+            <a:off x="6826121" y="691661"/>
+            <a:ext cx="1889099" cy="4107144"/>
+          </a:xfrm>
+          <a:prstGeom prst="rect">
+            <a:avLst/>
+          </a:prstGeom>
+        </p:spPr>
+      </p:pic>
+      <p:cxnSp>
+        <p:nvCxnSpPr>
+          <p:cNvPr id="12" name="Straight Arrow Connector 11">
+            <a:extLst>
+              <a:ext uri="{FF2B5EF4-FFF2-40B4-BE49-F238E27FC236}">
+                <a16:creationId xmlns:a16="http://schemas.microsoft.com/office/drawing/2014/main" id="{3A1266E3-78EA-F711-3D66-742DA96A4E23}"/>
+              </a:ext>
+            </a:extLst>
+          </p:cNvPr>
+          <p:cNvCxnSpPr>
+            <a:cxnSpLocks/>
+          </p:cNvCxnSpPr>
+          <p:nvPr/>
+        </p:nvCxnSpPr>
+        <p:spPr>
+          <a:xfrm flipV="1">
+            <a:off x="3777286" y="1321332"/>
+            <a:ext cx="651091" cy="550555"/>
+          </a:xfrm>
+          <a:prstGeom prst="straightConnector1">
+            <a:avLst/>
+          </a:prstGeom>
+          <a:ln>
+            <a:solidFill>
+              <a:srgbClr val="FF0000"/>
+            </a:solidFill>
+            <a:tailEnd type="triangle"/>
+          </a:ln>
+        </p:spPr>
+        <p:style>
+          <a:lnRef idx="2">
+            <a:schemeClr val="accent1"/>
+          </a:lnRef>
+          <a:fillRef idx="0">
+            <a:schemeClr val="accent1"/>
+          </a:fillRef>
+          <a:effectRef idx="1">
+            <a:schemeClr val="accent1"/>
+          </a:effectRef>
+          <a:fontRef idx="minor">
+            <a:schemeClr val="tx1"/>
+          </a:fontRef>
+        </p:style>
+      </p:cxnSp>
+      <p:sp>
+        <p:nvSpPr>
+          <p:cNvPr id="16" name="Rectangle 15">
+            <a:extLst>
+              <a:ext uri="{FF2B5EF4-FFF2-40B4-BE49-F238E27FC236}">
+                <a16:creationId xmlns:a16="http://schemas.microsoft.com/office/drawing/2014/main" id="{7E0F29FD-C5C8-23F9-EA3F-D17CCFB0B60B}"/>
+              </a:ext>
+            </a:extLst>
+          </p:cNvPr>
+          <p:cNvSpPr/>
+          <p:nvPr/>
+        </p:nvSpPr>
+        <p:spPr>
+          <a:xfrm>
+            <a:off x="4428377" y="3044808"/>
+            <a:ext cx="1780926" cy="186710"/>
+          </a:xfrm>
+          <a:prstGeom prst="rect">
+            <a:avLst/>
+          </a:prstGeom>
+          <a:noFill/>
+          <a:ln w="28575">
+            <a:solidFill>
+              <a:srgbClr val="FF0000"/>
+            </a:solidFill>
+          </a:ln>
+        </p:spPr>
+        <p:style>
+          <a:lnRef idx="1">
+            <a:schemeClr val="accent1"/>
+          </a:lnRef>
+          <a:fillRef idx="3">
+            <a:schemeClr val="accent1"/>
+          </a:fillRef>
+          <a:effectRef idx="2">
+            <a:schemeClr val="accent1"/>
+          </a:effectRef>
+          <a:fontRef idx="minor">
+            <a:schemeClr val="lt1"/>
+          </a:fontRef>
+        </p:style>
+        <p:txBody>
+          <a:bodyPr rtlCol="0" anchor="ctr"/>
+          <a:lstStyle/>
+          <a:p>
+            <a:pPr algn="ctr"/>
+            <a:endParaRPr lang="en-US"/>
+          </a:p>
+        </p:txBody>
+      </p:sp>
+      <p:cxnSp>
+        <p:nvCxnSpPr>
+          <p:cNvPr id="17" name="Straight Arrow Connector 16">
+            <a:extLst>
+              <a:ext uri="{FF2B5EF4-FFF2-40B4-BE49-F238E27FC236}">
+                <a16:creationId xmlns:a16="http://schemas.microsoft.com/office/drawing/2014/main" id="{6CD26AAB-4A93-9ECB-14BE-61E6F44E5164}"/>
+              </a:ext>
+            </a:extLst>
+          </p:cNvPr>
+          <p:cNvCxnSpPr>
+            <a:cxnSpLocks/>
+          </p:cNvCxnSpPr>
+          <p:nvPr/>
+        </p:nvCxnSpPr>
+        <p:spPr>
+          <a:xfrm flipV="1">
+            <a:off x="6209303" y="2355418"/>
+            <a:ext cx="694178" cy="703058"/>
+          </a:xfrm>
+          <a:prstGeom prst="straightConnector1">
+            <a:avLst/>
+          </a:prstGeom>
+          <a:ln>
+            <a:solidFill>
+              <a:srgbClr val="FF0000"/>
+            </a:solidFill>
+            <a:tailEnd type="triangle"/>
+          </a:ln>
+        </p:spPr>
+        <p:style>
+          <a:lnRef idx="2">
+            <a:schemeClr val="accent1"/>
+          </a:lnRef>
+          <a:fillRef idx="0">
+            <a:schemeClr val="accent1"/>
+          </a:fillRef>
+          <a:effectRef idx="1">
+            <a:schemeClr val="accent1"/>
+          </a:effectRef>
+          <a:fontRef idx="minor">
+            <a:schemeClr val="tx1"/>
+          </a:fontRef>
+        </p:style>
+      </p:cxnSp>
+      <p:sp>
+        <p:nvSpPr>
+          <p:cNvPr id="19" name="Rectangle 18">
+            <a:extLst>
+              <a:ext uri="{FF2B5EF4-FFF2-40B4-BE49-F238E27FC236}">
+                <a16:creationId xmlns:a16="http://schemas.microsoft.com/office/drawing/2014/main" id="{9B088EBD-1777-E072-C48A-7B3EB1AD8169}"/>
+              </a:ext>
+            </a:extLst>
+          </p:cNvPr>
+          <p:cNvSpPr/>
+          <p:nvPr/>
+        </p:nvSpPr>
+        <p:spPr>
+          <a:xfrm>
+            <a:off x="7343925" y="3561053"/>
+            <a:ext cx="1259095" cy="186710"/>
+          </a:xfrm>
+          <a:prstGeom prst="rect">
+            <a:avLst/>
+          </a:prstGeom>
+          <a:noFill/>
+          <a:ln w="28575">
+            <a:solidFill>
+              <a:srgbClr val="FF0000"/>
+            </a:solidFill>
+          </a:ln>
+        </p:spPr>
+        <p:style>
+          <a:lnRef idx="1">
+            <a:schemeClr val="accent1"/>
+          </a:lnRef>
+          <a:fillRef idx="3">
+            <a:schemeClr val="accent1"/>
+          </a:fillRef>
+          <a:effectRef idx="2">
+            <a:schemeClr val="accent1"/>
+          </a:effectRef>
+          <a:fontRef idx="minor">
+            <a:schemeClr val="lt1"/>
+          </a:fontRef>
+        </p:style>
+        <p:txBody>
+          <a:bodyPr rtlCol="0" anchor="ctr"/>
+          <a:lstStyle/>
+          <a:p>
+            <a:pPr algn="ctr"/>
+            <a:endParaRPr lang="en-US"/>
+          </a:p>
+        </p:txBody>
+      </p:sp>
+      <p:cxnSp>
+        <p:nvCxnSpPr>
+          <p:cNvPr id="21" name="Straight Arrow Connector 20">
+            <a:extLst>
+              <a:ext uri="{FF2B5EF4-FFF2-40B4-BE49-F238E27FC236}">
+                <a16:creationId xmlns:a16="http://schemas.microsoft.com/office/drawing/2014/main" id="{F3545CA8-659F-6416-28CF-C6D29B01723D}"/>
+              </a:ext>
+            </a:extLst>
+          </p:cNvPr>
+          <p:cNvCxnSpPr>
+            <a:cxnSpLocks/>
+          </p:cNvCxnSpPr>
+          <p:nvPr/>
+        </p:nvCxnSpPr>
+        <p:spPr>
+          <a:xfrm flipH="1">
+            <a:off x="8557234" y="3138163"/>
+            <a:ext cx="315971" cy="425283"/>
+          </a:xfrm>
+          <a:prstGeom prst="straightConnector1">
+            <a:avLst/>
+          </a:prstGeom>
+          <a:ln>
+            <a:solidFill>
+              <a:srgbClr val="FF0000"/>
+            </a:solidFill>
+            <a:tailEnd type="triangle"/>
+          </a:ln>
+        </p:spPr>
+        <p:style>
+          <a:lnRef idx="2">
+            <a:schemeClr val="accent1"/>
+          </a:lnRef>
+          <a:fillRef idx="0">
+            <a:schemeClr val="accent1"/>
+          </a:fillRef>
+          <a:effectRef idx="1">
+            <a:schemeClr val="accent1"/>
+          </a:effectRef>
+          <a:fontRef idx="minor">
+            <a:schemeClr val="tx1"/>
+          </a:fontRef>
+        </p:style>
+      </p:cxnSp>
     </p:spTree>
     <p:extLst>
       <p:ext uri="{BB962C8B-B14F-4D97-AF65-F5344CB8AC3E}">
@@ -9259,21 +9669,21 @@
 </file>
 
 <file path=customXml/item2.xml><?xml version="1.0" encoding="utf-8"?>
+<p:properties xmlns:p="http://schemas.microsoft.com/office/2006/metadata/properties" xmlns:xsi="http://www.w3.org/2001/XMLSchema-instance" xmlns:pc="http://schemas.microsoft.com/office/infopath/2007/PartnerControls">
+  <documentManagement>
+    <PublishingExpirationDate xmlns="http://schemas.microsoft.com/sharepoint/v3" xsi:nil="true"/>
+    <PublishingStartDate xmlns="http://schemas.microsoft.com/sharepoint/v3" xsi:nil="true"/>
+  </documentManagement>
+</p:properties>
+</file>
+
+<file path=customXml/item3.xml><?xml version="1.0" encoding="utf-8"?>
 <?mso-contentType ?>
 <FormTemplates xmlns="http://schemas.microsoft.com/sharepoint/v3/contenttype/forms">
   <Display>DocumentLibraryForm</Display>
   <Edit>DocumentLibraryForm</Edit>
   <New>DocumentLibraryForm</New>
 </FormTemplates>
-</file>
-
-<file path=customXml/item3.xml><?xml version="1.0" encoding="utf-8"?>
-<p:properties xmlns:p="http://schemas.microsoft.com/office/2006/metadata/properties" xmlns:xsi="http://www.w3.org/2001/XMLSchema-instance" xmlns:pc="http://schemas.microsoft.com/office/infopath/2007/PartnerControls">
-  <documentManagement>
-    <PublishingExpirationDate xmlns="http://schemas.microsoft.com/sharepoint/v3" xsi:nil="true"/>
-    <PublishingStartDate xmlns="http://schemas.microsoft.com/sharepoint/v3" xsi:nil="true"/>
-  </documentManagement>
-</p:properties>
 </file>
 
 <file path=customXml/itemProps1.xml><?xml version="1.0" encoding="utf-8"?>
@@ -9295,14 +9705,6 @@
 </file>
 
 <file path=customXml/itemProps2.xml><?xml version="1.0" encoding="utf-8"?>
-<ds:datastoreItem xmlns:ds="http://schemas.openxmlformats.org/officeDocument/2006/customXml" ds:itemID="{6CCB8030-6F99-446F-BD3B-E5E3F435F1FD}">
-  <ds:schemaRefs>
-    <ds:schemaRef ds:uri="http://schemas.microsoft.com/sharepoint/v3/contenttype/forms"/>
-  </ds:schemaRefs>
-</ds:datastoreItem>
-</file>
-
-<file path=customXml/itemProps3.xml><?xml version="1.0" encoding="utf-8"?>
 <ds:datastoreItem xmlns:ds="http://schemas.openxmlformats.org/officeDocument/2006/customXml" ds:itemID="{264D3FE7-A0C8-4453-A806-BCAD6F53B901}">
   <ds:schemaRefs>
     <ds:schemaRef ds:uri="http://schemas.microsoft.com/office/2006/metadata/properties"/>
@@ -9312,6 +9714,14 @@
 </ds:datastoreItem>
 </file>
 
+<file path=customXml/itemProps3.xml><?xml version="1.0" encoding="utf-8"?>
+<ds:datastoreItem xmlns:ds="http://schemas.openxmlformats.org/officeDocument/2006/customXml" ds:itemID="{6CCB8030-6F99-446F-BD3B-E5E3F435F1FD}">
+  <ds:schemaRefs>
+    <ds:schemaRef ds:uri="http://schemas.microsoft.com/sharepoint/v3/contenttype/forms"/>
+  </ds:schemaRefs>
+</ds:datastoreItem>
+</file>
+
 <file path=docMetadata/LabelInfo.xml><?xml version="1.0" encoding="utf-8"?>
 <clbl:labelList xmlns:clbl="http://schemas.microsoft.com/office/2020/mipLabelMetadata">
   <clbl:label id="{15ce9348-be2a-462b-8fc0-e1765a9b204a}" enabled="0" method="" siteId="{15ce9348-be2a-462b-8fc0-e1765a9b204a}" removed="1"/>
